--- a/Topic_C/Exam_Practice/TC-L06_Writing_Workshop_Digital_World_Communication.pptx
+++ b/Topic_C/Exam_Practice/TC-L06_Writing_Workshop_Digital_World_Communication.pptx
@@ -784,7 +784,11 @@
           <a:lstStyle/>
           <a:p>
             <a:r>
-              <a:rPr lang="en-US" dirty="0"/>
+              <a:rPr lang="ar-SA" dirty="0">
+                <a:latin typeface="Amiri" pitchFamily="2" charset="-78"/>
+                <a:ea typeface="Amiri" pitchFamily="2" charset="-78"/>
+                <a:cs typeface="Amiri" pitchFamily="2" charset="-78"/>
+              </a:rPr>
               <a:t>Q3 (3 min to choose and read). Title (أ) suits Core and Develop; title (ب) suits Stretch.</a:t>
             </a:r>
             <a:endParaRPr lang="en-US" dirty="0"/>
@@ -1403,7 +1407,11 @@
           <a:lstStyle/>
           <a:p>
             <a:r>
-              <a:rPr lang="en-US" dirty="0"/>
+              <a:rPr lang="ar-SA" dirty="0">
+                <a:latin typeface="Amiri" pitchFamily="2" charset="-78"/>
+                <a:ea typeface="Amiri" pitchFamily="2" charset="-78"/>
+                <a:cs typeface="Amiri" pitchFamily="2" charset="-78"/>
+              </a:rPr>
               <a:t>WELCOME (1 min) — while students join.
 • Greet each student by name as they arrive: السَّلَامُ عَلَيْكُمْ. Take the register (Pastoral Tracker: attendance 0/1).
 • 2-MINUTE CHECK-IN (SEND training): a private chat to any student who seemed unsettled last lesson — “Are you okay today? 👍 / 👎”.
@@ -1936,7 +1944,11 @@
           <a:lstStyle/>
           <a:p>
             <a:r>
-              <a:rPr lang="en-US" dirty="0"/>
+              <a:rPr lang="ar-SA" dirty="0">
+                <a:latin typeface="Amiri" pitchFamily="2" charset="-78"/>
+                <a:ea typeface="Amiri" pitchFamily="2" charset="-78"/>
+                <a:cs typeface="Amiri" pitchFamily="2" charset="-78"/>
+              </a:rPr>
               <a:t>Question words: كَمْ سَاعَةً (how many hours) · لِمَاذَا (why) · مَاذَا حَدَثَ (what happened — PAST) · سَتُغَيِّرُ (will change — FUTURE).</a:t>
             </a:r>
             <a:endParaRPr lang="en-US" dirty="0"/>
@@ -2508,6 +2520,7 @@
                   <a:srgbClr val="D4AF37"/>
                 </a:solidFill>
                 <a:latin typeface="Amiri" pitchFamily="2" charset="-78"/>
+                <a:ea typeface="Amiri" pitchFamily="2" charset="-78"/>
                 <a:cs typeface="Amiri" pitchFamily="2" charset="-78"/>
               </a:rPr>
               <a:t>م</a:t>
@@ -2714,6 +2727,7 @@
                   <a:srgbClr val="D4AF37"/>
                 </a:solidFill>
                 <a:latin typeface="Amiri" pitchFamily="2" charset="-78"/>
+                <a:ea typeface="Amiri" pitchFamily="2" charset="-78"/>
                 <a:cs typeface="Amiri" pitchFamily="2" charset="-78"/>
               </a:rPr>
               <a:t>وَرْشَةُ الكِتَابَةِ — العَالَمُ الرَّقْمِيُّ</a:t>
@@ -3171,6 +3185,7 @@
                   <a:srgbClr val="D4AF37"/>
                 </a:solidFill>
                 <a:latin typeface="Amiri" pitchFamily="2" charset="-78"/>
+                <a:ea typeface="Amiri" pitchFamily="2" charset="-78"/>
                 <a:cs typeface="Amiri" pitchFamily="2" charset="-78"/>
               </a:rPr>
               <a:t>م</a:t>
@@ -3491,6 +3506,7 @@
                   <a:srgbClr val="8A6D1E"/>
                 </a:solidFill>
                 <a:latin typeface="Amiri" pitchFamily="2" charset="-78"/>
+                <a:ea typeface="Amiri" pitchFamily="2" charset="-78"/>
                 <a:cs typeface="Amiri" pitchFamily="2" charset="-78"/>
               </a:rPr>
               <a:t>نَمُوذَجُ الإِجَابَةِ</a:t>
@@ -3604,6 +3620,7 @@
                   <a:srgbClr val="1F2A37"/>
                 </a:solidFill>
                 <a:latin typeface="Amiri" pitchFamily="2" charset="-78"/>
+                <a:ea typeface="Amiri" pitchFamily="2" charset="-78"/>
                 <a:cs typeface="Amiri" pitchFamily="2" charset="-78"/>
               </a:rPr>
               <a:t>مَرْحَبًا يَا خَالِدُ،</a:t>
@@ -3623,6 +3640,7 @@
                   <a:srgbClr val="1F2A37"/>
                 </a:solidFill>
                 <a:latin typeface="Amiri" pitchFamily="2" charset="-78"/>
+                <a:ea typeface="Amiri" pitchFamily="2" charset="-78"/>
                 <a:cs typeface="Amiri" pitchFamily="2" charset="-78"/>
               </a:rPr>
               <a:t>كَيْفَ حَالُكَ؟ أُرِيدُ أَنْ أُخْبِرَكَ عَنْ حَيَاتِي الرَّقْمِيَّةِ. أَسْتَخْدِمُ هَاتِفِي كُلَّ يَوْمٍ ثَلَاثَ سَاعَاتٍ تَقْرِيبًا. أَتَوَاصَلُ مَعَ أَصْدِقَائِي، وَأُشَاهِدُ دُرُوسًا عَلَى الإِنْتَرْنِتِ. تَطْبِيقِيَ المُفَضَّلُ تَطْبِيقٌ لِتَعَلُّمِ اللُّغَاتِ، لِأَنَّهُ سَهْلٌ وَمُمْتِعٌ. فِي الأُسْبُوعِ المَاضِي نَسِيتُ هَاتِفِي فِي البَيْتِ يَوْمًا كَامِلًا، وَشَعَرْتُ بِالمَلَلِ فِي البِدَايَةِ، لٰكِنِّي قَرَأْتُ كِتَابًا جَمِيلًا. فِي رَأْيِي، الإِنْتَرْنِتُ مُفِيدٌ، لٰكِنْ يَجِبُ أَنْ نُنَظِّمَ الوَقْتَ. فِي المُسْتَقْبَلِ سَأَسْتَخْدِمُ الهَاتِفَ أَقَلَّ.</a:t>
@@ -3642,6 +3660,7 @@
                   <a:srgbClr val="1F2A37"/>
                 </a:solidFill>
                 <a:latin typeface="Amiri" pitchFamily="2" charset="-78"/>
+                <a:ea typeface="Amiri" pitchFamily="2" charset="-78"/>
                 <a:cs typeface="Amiri" pitchFamily="2" charset="-78"/>
               </a:rPr>
               <a:t>إِلَى اللِّقَاءِ،</a:t>
@@ -3661,6 +3680,7 @@
                   <a:srgbClr val="1F2A37"/>
                 </a:solidFill>
                 <a:latin typeface="Amiri" pitchFamily="2" charset="-78"/>
+                <a:ea typeface="Amiri" pitchFamily="2" charset="-78"/>
                 <a:cs typeface="Amiri" pitchFamily="2" charset="-78"/>
               </a:rPr>
               <a:t>سَامِي</a:t>
@@ -3824,11 +3844,12 @@
               <a:buNone/>
             </a:pPr>
             <a:r>
-              <a:rPr lang="en-US" sz="950" b="1" dirty="0">
+              <a:rPr lang="ar-SA" sz="950" b="1" dirty="0">
                 <a:solidFill>
                   <a:srgbClr val="FFFFFF"/>
                 </a:solidFill>
                 <a:latin typeface="Calibri" pitchFamily="34" charset="0"/>
+                <a:ea typeface="Amiri" pitchFamily="2" charset="-78"/>
                 <a:cs typeface="Amiri" pitchFamily="2" charset="-78"/>
               </a:rPr>
               <a:t>أَتَوَاصَلُ مَعَ</a:t>
@@ -3889,11 +3910,12 @@
               <a:buNone/>
             </a:pPr>
             <a:r>
-              <a:rPr lang="en-US" sz="950" b="1" dirty="0">
+              <a:rPr lang="ar-SA" sz="950" b="1" dirty="0">
                 <a:solidFill>
                   <a:srgbClr val="FFFFFF"/>
                 </a:solidFill>
                 <a:latin typeface="Calibri" pitchFamily="34" charset="0"/>
+                <a:ea typeface="Amiri" pitchFamily="2" charset="-78"/>
                 <a:cs typeface="Amiri" pitchFamily="2" charset="-78"/>
               </a:rPr>
               <a:t>تَطْبِيقٌ لِتَعَلُّمِ</a:t>
@@ -3954,11 +3976,12 @@
               <a:buNone/>
             </a:pPr>
             <a:r>
-              <a:rPr lang="en-US" sz="950" b="1" dirty="0">
+              <a:rPr lang="ar-SA" sz="950" b="1" dirty="0">
                 <a:solidFill>
                   <a:srgbClr val="FFFFFF"/>
                 </a:solidFill>
                 <a:latin typeface="Calibri" pitchFamily="34" charset="0"/>
+                <a:ea typeface="Amiri" pitchFamily="2" charset="-78"/>
                 <a:cs typeface="Amiri" pitchFamily="2" charset="-78"/>
               </a:rPr>
               <a:t>نَسِيتُ هَاتِفِي</a:t>
@@ -4019,11 +4042,12 @@
               <a:buNone/>
             </a:pPr>
             <a:r>
-              <a:rPr lang="en-US" sz="950" b="1" dirty="0">
+              <a:rPr lang="ar-SA" sz="950" b="1" dirty="0">
                 <a:solidFill>
                   <a:srgbClr val="FFFFFF"/>
                 </a:solidFill>
                 <a:latin typeface="Calibri" pitchFamily="34" charset="0"/>
+                <a:ea typeface="Amiri" pitchFamily="2" charset="-78"/>
                 <a:cs typeface="Amiri" pitchFamily="2" charset="-78"/>
               </a:rPr>
               <a:t>سَأَسْتَخْدِمُ … أَقَلَّ</a:t>
@@ -4157,6 +4181,7 @@
                   <a:srgbClr val="D4AF37"/>
                 </a:solidFill>
                 <a:latin typeface="Amiri" pitchFamily="2" charset="-78"/>
+                <a:ea typeface="Amiri" pitchFamily="2" charset="-78"/>
                 <a:cs typeface="Amiri" pitchFamily="2" charset="-78"/>
               </a:rPr>
               <a:t>م</a:t>
@@ -4477,6 +4502,7 @@
                   <a:srgbClr val="8A6D1E"/>
                 </a:solidFill>
                 <a:latin typeface="Amiri" pitchFamily="2" charset="-78"/>
+                <a:ea typeface="Amiri" pitchFamily="2" charset="-78"/>
                 <a:cs typeface="Amiri" pitchFamily="2" charset="-78"/>
               </a:rPr>
               <a:t>نَمُوذَجُ الإِجَابَةِ</a:t>
@@ -4590,6 +4616,7 @@
                   <a:srgbClr val="1F2A37"/>
                 </a:solidFill>
                 <a:latin typeface="Amiri" pitchFamily="2" charset="-78"/>
+                <a:ea typeface="Amiri" pitchFamily="2" charset="-78"/>
                 <a:cs typeface="Amiri" pitchFamily="2" charset="-78"/>
               </a:rPr>
               <a:t>عَزِيزِي خَالِدُ،</a:t>
@@ -4609,6 +4636,7 @@
                   <a:srgbClr val="1F2A37"/>
                 </a:solidFill>
                 <a:latin typeface="Amiri" pitchFamily="2" charset="-78"/>
+                <a:ea typeface="Amiri" pitchFamily="2" charset="-78"/>
                 <a:cs typeface="Amiri" pitchFamily="2" charset="-78"/>
               </a:rPr>
               <a:t>سَأَلْتَنِي فِي رِسَالَتِكَ عَنْ حَيَاتِي الرَّقْمِيَّةِ، فَإِلَيْكَ الحَقِيقَةَ: أَقْضِي أَمَامَ الشَّاشَاتِ نَحْوَ أَرْبَعِ سَاعَاتٍ يَوْمِيًّا، نِصْفُهَا لِلدِّرَاسَةِ عَلَى مِنَصَّةِ المَدْرَسَةِ، وَالنِّصْفُ الآخَرُ لِلتَّوَاصُلِ مَعَ الأَصْدِقَاءِ. وَأَكْثَرُ تَطْبِيقٍ أَعْتَمِدُ عَلَيْهِ تَطْبِيقٌ لِلْمُرَاجَعَةِ يَخْتَبِرُنِي فِي المُفْرَدَاتِ كُلَّ مَسَاءٍ، وَقَدْ حَسَّنَ دَرَجَاتِي كَثِيرًا. لٰكِنْ حَدَثَ شَيْءٌ غَرِيبٌ الأُسْبُوعَ المَاضِي؛ فَقَدْ تَعَطَّلَ هَاتِفِي ثَلَاثَةَ أَيَّامٍ، فَاكْتَشَفْتُ كَمْ مِنَ الوَقْتِ كُنْتُ أُضَيِّعُ! مِنْ نَاحِيَةٍ، لَا أَسْتَطِيعُ الاسْتِغْنَاءَ عَنِ الإِنْتَرْنِتِ، وَمِنْ نَاحِيَةٍ أُخْرَى، أَحْتَاجُ إِلَى حُدُودٍ؛ لِذٰلِكَ سَأُطْفِئُ هَاتِفِي بَعْدَ السَّاعَةِ التَّاسِعَةِ.</a:t>
@@ -4628,6 +4656,7 @@
                   <a:srgbClr val="1F2A37"/>
                 </a:solidFill>
                 <a:latin typeface="Amiri" pitchFamily="2" charset="-78"/>
+                <a:ea typeface="Amiri" pitchFamily="2" charset="-78"/>
                 <a:cs typeface="Amiri" pitchFamily="2" charset="-78"/>
               </a:rPr>
               <a:t>مَعَ تَحِيَّاتِي،</a:t>
@@ -4647,6 +4676,7 @@
                   <a:srgbClr val="1F2A37"/>
                 </a:solidFill>
                 <a:latin typeface="Amiri" pitchFamily="2" charset="-78"/>
+                <a:ea typeface="Amiri" pitchFamily="2" charset="-78"/>
                 <a:cs typeface="Amiri" pitchFamily="2" charset="-78"/>
               </a:rPr>
               <a:t>سَامِي</a:t>
@@ -4810,11 +4840,12 @@
               <a:buNone/>
             </a:pPr>
             <a:r>
-              <a:rPr lang="en-US" sz="950" b="1" dirty="0">
+              <a:rPr lang="ar-SA" sz="950" b="1" dirty="0">
                 <a:solidFill>
                   <a:srgbClr val="FFFFFF"/>
                 </a:solidFill>
                 <a:latin typeface="Calibri" pitchFamily="34" charset="0"/>
+                <a:ea typeface="Amiri" pitchFamily="2" charset="-78"/>
                 <a:cs typeface="Amiri" pitchFamily="2" charset="-78"/>
               </a:rPr>
               <a:t>نِصْفُهَا لِلدِّرَاسَةِ</a:t>
@@ -4875,11 +4906,12 @@
               <a:buNone/>
             </a:pPr>
             <a:r>
-              <a:rPr lang="en-US" sz="950" b="1" dirty="0">
+              <a:rPr lang="ar-SA" sz="950" b="1" dirty="0">
                 <a:solidFill>
                   <a:srgbClr val="FFFFFF"/>
                 </a:solidFill>
                 <a:latin typeface="Calibri" pitchFamily="34" charset="0"/>
+                <a:ea typeface="Amiri" pitchFamily="2" charset="-78"/>
                 <a:cs typeface="Amiri" pitchFamily="2" charset="-78"/>
               </a:rPr>
               <a:t>أَعْتَمِدُ عَلَيْهِ</a:t>
@@ -4940,11 +4972,12 @@
               <a:buNone/>
             </a:pPr>
             <a:r>
-              <a:rPr lang="en-US" sz="950" b="1" dirty="0">
+              <a:rPr lang="ar-SA" sz="950" b="1" dirty="0">
                 <a:solidFill>
                   <a:srgbClr val="FFFFFF"/>
                 </a:solidFill>
                 <a:latin typeface="Calibri" pitchFamily="34" charset="0"/>
+                <a:ea typeface="Amiri" pitchFamily="2" charset="-78"/>
                 <a:cs typeface="Amiri" pitchFamily="2" charset="-78"/>
               </a:rPr>
               <a:t>كُنْتُ أُضَيِّعُ</a:t>
@@ -5005,11 +5038,12 @@
               <a:buNone/>
             </a:pPr>
             <a:r>
-              <a:rPr lang="en-US" sz="950" b="1" dirty="0">
+              <a:rPr lang="ar-SA" sz="950" b="1" dirty="0">
                 <a:solidFill>
                   <a:srgbClr val="FFFFFF"/>
                 </a:solidFill>
                 <a:latin typeface="Calibri" pitchFamily="34" charset="0"/>
+                <a:ea typeface="Amiri" pitchFamily="2" charset="-78"/>
                 <a:cs typeface="Amiri" pitchFamily="2" charset="-78"/>
               </a:rPr>
               <a:t>مِنْ نَاحِيَةٍ … وَمِنْ نَاحِيَةٍ أُخْرَى</a:t>
@@ -5143,6 +5177,7 @@
                   <a:srgbClr val="D4AF37"/>
                 </a:solidFill>
                 <a:latin typeface="Amiri" pitchFamily="2" charset="-78"/>
+                <a:ea typeface="Amiri" pitchFamily="2" charset="-78"/>
                 <a:cs typeface="Amiri" pitchFamily="2" charset="-78"/>
               </a:rPr>
               <a:t>م</a:t>
@@ -5463,6 +5498,7 @@
                   <a:srgbClr val="8A6D1E"/>
                 </a:solidFill>
                 <a:latin typeface="Amiri" pitchFamily="2" charset="-78"/>
+                <a:ea typeface="Amiri" pitchFamily="2" charset="-78"/>
                 <a:cs typeface="Amiri" pitchFamily="2" charset="-78"/>
               </a:rPr>
               <a:t>اخْتَرْ عُنْوَانًا وَاحِدًا</a:t>
@@ -5743,6 +5779,7 @@
                   <a:srgbClr val="1B3B6F"/>
                 </a:solidFill>
                 <a:latin typeface="Amiri" pitchFamily="2" charset="-78"/>
+                <a:ea typeface="Amiri" pitchFamily="2" charset="-78"/>
                 <a:cs typeface="Amiri" pitchFamily="2" charset="-78"/>
               </a:rPr>
               <a:t>التِّكْنُولُوجْيَا فِي حَيَاتِي</a:t>
@@ -5781,6 +5818,7 @@
                   <a:srgbClr val="1B3B6F"/>
                 </a:solidFill>
                 <a:latin typeface="Amiri" pitchFamily="2" charset="-78"/>
+                <a:ea typeface="Amiri" pitchFamily="2" charset="-78"/>
                 <a:cs typeface="Amiri" pitchFamily="2" charset="-78"/>
               </a:rPr>
               <a:t>(أ)</a:t>
@@ -5887,6 +5925,7 @@
                   <a:srgbClr val="1B3B6F"/>
                 </a:solidFill>
                 <a:latin typeface="Amiri" pitchFamily="2" charset="-78"/>
+                <a:ea typeface="Amiri" pitchFamily="2" charset="-78"/>
                 <a:cs typeface="Amiri" pitchFamily="2" charset="-78"/>
               </a:rPr>
               <a:t>الأَجْهِزَةُ الَّتِي تَسْتَخْدِمُهَا وَكَيْفَ · التَّوَاصُلُ مَعَ الآخَرِينَ · تَجْرِبَةٌ مَعَ التِّكْنُولُوجْيَا · رَأْيُكَ وَخِطَطُكَ</a:t>
@@ -6018,6 +6057,7 @@
                   <a:srgbClr val="1B3B6F"/>
                 </a:solidFill>
                 <a:latin typeface="Amiri" pitchFamily="2" charset="-78"/>
+                <a:ea typeface="Amiri" pitchFamily="2" charset="-78"/>
                 <a:cs typeface="Amiri" pitchFamily="2" charset="-78"/>
               </a:rPr>
               <a:t>وَسَائِلُ التَّوَاصُلِ الاجْتِمَاعِيِّ: صَدِيقٌ أَمْ عَدُوٌّ؟</a:t>
@@ -6056,6 +6096,7 @@
                   <a:srgbClr val="1B3B6F"/>
                 </a:solidFill>
                 <a:latin typeface="Amiri" pitchFamily="2" charset="-78"/>
+                <a:ea typeface="Amiri" pitchFamily="2" charset="-78"/>
                 <a:cs typeface="Amiri" pitchFamily="2" charset="-78"/>
               </a:rPr>
               <a:t>(ب)</a:t>
@@ -6159,6 +6200,7 @@
                   <a:srgbClr val="1B3B6F"/>
                 </a:solidFill>
                 <a:latin typeface="Amiri" pitchFamily="2" charset="-78"/>
+                <a:ea typeface="Amiri" pitchFamily="2" charset="-78"/>
                 <a:cs typeface="Amiri" pitchFamily="2" charset="-78"/>
               </a:rPr>
               <a:t>مَكَانَتُهَا فِي حَيَاةِ الشَّبَابِ · فَوَائِدُهَا وَأَضْرَارُهَا · مِثَالٌ مِنَ الوَاقِعِ · رَأْيُكَ</a:t>
@@ -6358,6 +6400,7 @@
                   <a:srgbClr val="D4AF37"/>
                 </a:solidFill>
                 <a:latin typeface="Amiri" pitchFamily="2" charset="-78"/>
+                <a:ea typeface="Amiri" pitchFamily="2" charset="-78"/>
                 <a:cs typeface="Amiri" pitchFamily="2" charset="-78"/>
               </a:rPr>
               <a:t>م</a:t>
@@ -6678,6 +6721,7 @@
                   <a:srgbClr val="8A6D1E"/>
                 </a:solidFill>
                 <a:latin typeface="Amiri" pitchFamily="2" charset="-78"/>
+                <a:ea typeface="Amiri" pitchFamily="2" charset="-78"/>
                 <a:cs typeface="Amiri" pitchFamily="2" charset="-78"/>
               </a:rPr>
               <a:t>خُطَّةُ الكِتَابَةِ</a:t>
@@ -7302,6 +7346,7 @@
                   <a:srgbClr val="1B3B6F"/>
                 </a:solidFill>
                 <a:latin typeface="Amiri" pitchFamily="2" charset="-78"/>
+                <a:ea typeface="Amiri" pitchFamily="2" charset="-78"/>
                 <a:cs typeface="Amiri" pitchFamily="2" charset="-78"/>
               </a:rPr>
               <a:t>أَتَفَاعَلُ مَعَ المُعَلِّمِينَ وَالطُّلَّابِ.</a:t>
@@ -7401,6 +7446,7 @@
                   <a:srgbClr val="1B3B6F"/>
                 </a:solidFill>
                 <a:latin typeface="Amiri" pitchFamily="2" charset="-78"/>
+                <a:ea typeface="Amiri" pitchFamily="2" charset="-78"/>
                 <a:cs typeface="Amiri" pitchFamily="2" charset="-78"/>
               </a:rPr>
               <a:t>بَحَثْتُ عَنِ المَعْلُومَاتِ، وَحَصَلْتُ عَلَى دَرَجَةٍ عَالِيَةٍ.</a:t>
@@ -7500,6 +7546,7 @@
                   <a:srgbClr val="1B3B6F"/>
                 </a:solidFill>
                 <a:latin typeface="Amiri" pitchFamily="2" charset="-78"/>
+                <a:ea typeface="Amiri" pitchFamily="2" charset="-78"/>
                 <a:cs typeface="Amiri" pitchFamily="2" charset="-78"/>
               </a:rPr>
               <a:t>سَأُغْلِقُ هَاتِفِي قَبْلَ النَّوْمِ بِسَاعَةٍ.</a:t>
@@ -7661,6 +7708,7 @@
                   <a:srgbClr val="1F2A37"/>
                 </a:solidFill>
                 <a:latin typeface="Amiri" pitchFamily="2" charset="-78"/>
+                <a:ea typeface="Amiri" pitchFamily="2" charset="-78"/>
                 <a:cs typeface="Amiri" pitchFamily="2" charset="-78"/>
               </a:rPr>
               <a:t>أ</a:t>
@@ -7687,6 +7735,7 @@
                   <a:srgbClr val="1F2A37"/>
                 </a:solidFill>
                 <a:latin typeface="Amiri" pitchFamily="2" charset="-78"/>
+                <a:ea typeface="Amiri" pitchFamily="2" charset="-78"/>
                 <a:cs typeface="Amiri" pitchFamily="2" charset="-78"/>
               </a:rPr>
               <a:t>ب</a:t>
@@ -7833,6 +7882,7 @@
                   <a:srgbClr val="D4AF37"/>
                 </a:solidFill>
                 <a:latin typeface="Amiri" pitchFamily="2" charset="-78"/>
+                <a:ea typeface="Amiri" pitchFamily="2" charset="-78"/>
                 <a:cs typeface="Amiri" pitchFamily="2" charset="-78"/>
               </a:rPr>
               <a:t>م</a:t>
@@ -8090,6 +8140,7 @@
                   <a:srgbClr val="8A6D1E"/>
                 </a:solidFill>
                 <a:latin typeface="Amiri" pitchFamily="2" charset="-78"/>
+                <a:ea typeface="Amiri" pitchFamily="2" charset="-78"/>
                 <a:cs typeface="Amiri" pitchFamily="2" charset="-78"/>
               </a:rPr>
               <a:t>أ</a:t>
@@ -8154,6 +8205,7 @@
                   <a:srgbClr val="1B3B6F"/>
                 </a:solidFill>
                 <a:latin typeface="Amiri" pitchFamily="2" charset="-78"/>
+                <a:ea typeface="Amiri" pitchFamily="2" charset="-78"/>
                 <a:cs typeface="Amiri" pitchFamily="2" charset="-78"/>
               </a:rPr>
               <a:t>أ</a:t>
@@ -8205,6 +8257,7 @@
                   <a:srgbClr val="8A6D1E"/>
                 </a:solidFill>
                 <a:latin typeface="Amiri" pitchFamily="2" charset="-78"/>
+                <a:ea typeface="Amiri" pitchFamily="2" charset="-78"/>
                 <a:cs typeface="Amiri" pitchFamily="2" charset="-78"/>
               </a:rPr>
               <a:t>نَمُوذَجُ الإِجَابَةِ</a:t>
@@ -8318,6 +8371,7 @@
                   <a:srgbClr val="1F2A37"/>
                 </a:solidFill>
                 <a:latin typeface="Amiri" pitchFamily="2" charset="-78"/>
+                <a:ea typeface="Amiri" pitchFamily="2" charset="-78"/>
                 <a:cs typeface="Amiri" pitchFamily="2" charset="-78"/>
               </a:rPr>
               <a:t>التِّكْنُولُوجْيَا مُهِمَّةٌ جِدًّا فِي حَيَاتِي. عِنْدِي هَاتِفٌ ذَكِيٌّ وَحَاسُوبٌ مَحْمُولٌ. أَسْتَخْدِمُ الحَاسُوبَ لِلدِّرَاسَةِ، لِأَنِّي أَدْرُسُ فِي مَدْرَسَةٍ عَلَى الإِنْتَرْنِتِ. أَحْضُرُ الدُّرُوسَ كُلَّ صَبَاحٍ، وَأَتَفَاعَلُ مَعَ المُعَلِّمِينَ وَالطُّلَّابِ.</a:t>
@@ -8337,6 +8391,7 @@
                   <a:srgbClr val="1F2A37"/>
                 </a:solidFill>
                 <a:latin typeface="Amiri" pitchFamily="2" charset="-78"/>
+                <a:ea typeface="Amiri" pitchFamily="2" charset="-78"/>
                 <a:cs typeface="Amiri" pitchFamily="2" charset="-78"/>
               </a:rPr>
               <a:t>أَسْتَخْدِمُ الهَاتِفَ لِلتَّوَاصُلِ مَعَ أَصْدِقَائِي وَأُسْرَتِي. جَدَّتِي تَسْكُنُ فِي الأُرْدُنِّ، وَأَتَكَلَّمُ مَعَهَا بِالفِيدْيُو كُلَّ يَوْمِ جُمُعَةٍ، وَهِيَ سَعِيدَةٌ جِدًّا بِذٰلِكَ. أُحِبُّ أَيْضًا تَطْبِيقَاتِ الأَلْعَابِ وَالمُوسِيقَى، لٰكِنِّي لَا أَلْعَبُ كَثِيرًا، لِأَنَّ وَقْتِي مَشْغُولٌ بِالوَاجِبَاتِ وَالرِّيَاضَةِ.</a:t>
@@ -8356,6 +8411,7 @@
                   <a:srgbClr val="1F2A37"/>
                 </a:solidFill>
                 <a:latin typeface="Amiri" pitchFamily="2" charset="-78"/>
+                <a:ea typeface="Amiri" pitchFamily="2" charset="-78"/>
                 <a:cs typeface="Amiri" pitchFamily="2" charset="-78"/>
               </a:rPr>
               <a:t>فِي السَّنَةِ المَاضِيَةِ عَمِلْتُ مَشْرُوعًا عَنِ الحَيَوَانَاتِ. بَحَثْتُ عَنِ المَعْلُومَاتِ عَلَى الإِنْتَرْنِتِ، وَشَاهَدْتُ أَفْلَامًا وَثَائِقِيَّةً، ثُمَّ صَنَعْتُ عَرْضًا جَمِيلًا. حَصَلْتُ عَلَى دَرَجَةٍ عَالِيَةٍ، وَكُنْتُ سَعِيدًا جِدًّا.</a:t>
@@ -8375,6 +8431,7 @@
                   <a:srgbClr val="1F2A37"/>
                 </a:solidFill>
                 <a:latin typeface="Amiri" pitchFamily="2" charset="-78"/>
+                <a:ea typeface="Amiri" pitchFamily="2" charset="-78"/>
                 <a:cs typeface="Amiri" pitchFamily="2" charset="-78"/>
               </a:rPr>
               <a:t>فِي رَأْيِي، الإِنْتَرْنِتُ مُفِيدٌ، لٰكِنَّ الاسْتِخْدَامَ الكَثِيرَ يَضُرُّ بِالعُيُونِ وَبِالنَّوْمِ. لِذٰلِكَ سَأُغْلِقُ هَاتِفِي قَبْلَ النَّوْمِ بِسَاعَةٍ، وَسَأَمْشِي فِي الحَدِيقَةِ أَكْثَرَ. فِي المُسْتَقْبَلِ أُرِيدُ أَنْ أَعْمَلَ مُبَرْمِجًا.</a:t>
@@ -8538,11 +8595,12 @@
               <a:buNone/>
             </a:pPr>
             <a:r>
-              <a:rPr lang="en-US" sz="950" b="1" dirty="0">
+              <a:rPr lang="ar-SA" sz="950" b="1" dirty="0">
                 <a:solidFill>
                   <a:srgbClr val="FFFFFF"/>
                 </a:solidFill>
                 <a:latin typeface="Calibri" pitchFamily="34" charset="0"/>
+                <a:ea typeface="Amiri" pitchFamily="2" charset="-78"/>
                 <a:cs typeface="Amiri" pitchFamily="2" charset="-78"/>
               </a:rPr>
               <a:t>أَتَفَاعَلُ مَعَ</a:t>
@@ -8603,11 +8661,12 @@
               <a:buNone/>
             </a:pPr>
             <a:r>
-              <a:rPr lang="en-US" sz="950" b="1" dirty="0">
+              <a:rPr lang="ar-SA" sz="950" b="1" dirty="0">
                 <a:solidFill>
                   <a:srgbClr val="FFFFFF"/>
                 </a:solidFill>
                 <a:latin typeface="Calibri" pitchFamily="34" charset="0"/>
+                <a:ea typeface="Amiri" pitchFamily="2" charset="-78"/>
                 <a:cs typeface="Amiri" pitchFamily="2" charset="-78"/>
               </a:rPr>
               <a:t>لِلتَّوَاصُلِ مَعَ</a:t>
@@ -8668,11 +8727,12 @@
               <a:buNone/>
             </a:pPr>
             <a:r>
-              <a:rPr lang="en-US" sz="950" b="1" dirty="0">
+              <a:rPr lang="ar-SA" sz="950" b="1" dirty="0">
                 <a:solidFill>
                   <a:srgbClr val="FFFFFF"/>
                 </a:solidFill>
                 <a:latin typeface="Calibri" pitchFamily="34" charset="0"/>
+                <a:ea typeface="Amiri" pitchFamily="2" charset="-78"/>
                 <a:cs typeface="Amiri" pitchFamily="2" charset="-78"/>
               </a:rPr>
               <a:t>بَحَثْتُ عَنِ</a:t>
@@ -8733,11 +8793,12 @@
               <a:buNone/>
             </a:pPr>
             <a:r>
-              <a:rPr lang="en-US" sz="950" b="1" dirty="0">
+              <a:rPr lang="ar-SA" sz="950" b="1" dirty="0">
                 <a:solidFill>
                   <a:srgbClr val="FFFFFF"/>
                 </a:solidFill>
                 <a:latin typeface="Calibri" pitchFamily="34" charset="0"/>
+                <a:ea typeface="Amiri" pitchFamily="2" charset="-78"/>
                 <a:cs typeface="Amiri" pitchFamily="2" charset="-78"/>
               </a:rPr>
               <a:t>حَصَلْتُ عَلَى</a:t>
@@ -8871,6 +8932,7 @@
                   <a:srgbClr val="D4AF37"/>
                 </a:solidFill>
                 <a:latin typeface="Amiri" pitchFamily="2" charset="-78"/>
+                <a:ea typeface="Amiri" pitchFamily="2" charset="-78"/>
                 <a:cs typeface="Amiri" pitchFamily="2" charset="-78"/>
               </a:rPr>
               <a:t>م</a:t>
@@ -9128,6 +9190,7 @@
                   <a:srgbClr val="8A6D1E"/>
                 </a:solidFill>
                 <a:latin typeface="Amiri" pitchFamily="2" charset="-78"/>
+                <a:ea typeface="Amiri" pitchFamily="2" charset="-78"/>
                 <a:cs typeface="Amiri" pitchFamily="2" charset="-78"/>
               </a:rPr>
               <a:t>أ</a:t>
@@ -9192,6 +9255,7 @@
                   <a:srgbClr val="1B3B6F"/>
                 </a:solidFill>
                 <a:latin typeface="Amiri" pitchFamily="2" charset="-78"/>
+                <a:ea typeface="Amiri" pitchFamily="2" charset="-78"/>
                 <a:cs typeface="Amiri" pitchFamily="2" charset="-78"/>
               </a:rPr>
               <a:t>أ</a:t>
@@ -9243,6 +9307,7 @@
                   <a:srgbClr val="8A6D1E"/>
                 </a:solidFill>
                 <a:latin typeface="Amiri" pitchFamily="2" charset="-78"/>
+                <a:ea typeface="Amiri" pitchFamily="2" charset="-78"/>
                 <a:cs typeface="Amiri" pitchFamily="2" charset="-78"/>
               </a:rPr>
               <a:t>نَمُوذَجُ الإِجَابَةِ</a:t>
@@ -9356,6 +9421,7 @@
                   <a:srgbClr val="1F2A37"/>
                 </a:solidFill>
                 <a:latin typeface="Amiri" pitchFamily="2" charset="-78"/>
+                <a:ea typeface="Amiri" pitchFamily="2" charset="-78"/>
                 <a:cs typeface="Amiri" pitchFamily="2" charset="-78"/>
               </a:rPr>
               <a:t>لَا أَسْتَطِيعُ أَنْ أَتَخَيَّلَ يَوْمًا وَاحِدًا بِلَا تِكْنُولُوجْيَا؛ فَهِيَ مَدْرَسَتِي وَمَكْتَبَتِي وَنَافِذَتِي عَلَى العَالَمِ. وَبِمَا أَنِّي أَدْرُسُ فِي مَدْرَسَةٍ إِلِكْتْرُونِيَّةٍ، فَأَنَا أَتَفَاعَلُ مَعَ مُعَلِّمِينَ وَزُمَلَاءَ مِنْ عَشْرِ دُوَلٍ مُخْتَلِفَةٍ دُونَ أَنْ أُغَادِرَ غُرْفَتِي. وَحِينَ أَحْتَاجُ إِلَى مَعْلُومَةٍ، أَبْحَثُ عَنْهَا فِي ثَوَانٍ بَدَلًا مِنْ سَاعَاتٍ فِي المَكْتَبَةِ.</a:t>
@@ -9375,6 +9441,7 @@
                   <a:srgbClr val="1F2A37"/>
                 </a:solidFill>
                 <a:latin typeface="Amiri" pitchFamily="2" charset="-78"/>
+                <a:ea typeface="Amiri" pitchFamily="2" charset="-78"/>
                 <a:cs typeface="Amiri" pitchFamily="2" charset="-78"/>
               </a:rPr>
               <a:t>أَمَّا خَارِجَ الدِّرَاسَةِ، فَأَسْتَخْدِمُ وَسَائِلَ التَّوَاصُلِ لِلتَّوَاصُلِ مَعَ أَقَارِبِي المُنْتَشِرِينَ بَيْنَ لَنْدَنَ وَعَمَّانَ وَدُبَيّ، وَأُعَلِّقُ عَلَى صُوَرِهِمْ وَأَخْبَارِهِمْ كَأَنَّنَا نَعِيشُ فِي بَيْتٍ وَاحِدٍ.</a:t>
@@ -9394,6 +9461,7 @@
                   <a:srgbClr val="1F2A37"/>
                 </a:solidFill>
                 <a:latin typeface="Amiri" pitchFamily="2" charset="-78"/>
+                <a:ea typeface="Amiri" pitchFamily="2" charset="-78"/>
                 <a:cs typeface="Amiri" pitchFamily="2" charset="-78"/>
               </a:rPr>
               <a:t>غَيْرَ أَنَّ تَجْرِبَةً عِشْتُهَا فِي الصَّيْفِ المَاضِي غَيَّرَتْ نَظْرَتِي؛ فَقَدْ قَضَيْتُ أُسْبُوعًا فِي مُخَيَّمٍ كَشْفِيٍّ بِلَا إِنْتَرْنِتٍ. فِي اليَوْمِ الأَوَّلِ شَعَرْتُ بِالقَلَقِ، لٰكِنِّي بَعْدَ ذٰلِكَ اكْتَشَفْتُ مُتْعَةَ الحَدِيثِ حَوْلَ النَّارِ، وَنِمْتُ أَعْمَقَ مِمَّا نِمْتُ مُنْذُ سَنَوَاتٍ.</a:t>
@@ -9413,6 +9481,7 @@
                   <a:srgbClr val="1F2A37"/>
                 </a:solidFill>
                 <a:latin typeface="Amiri" pitchFamily="2" charset="-78"/>
+                <a:ea typeface="Amiri" pitchFamily="2" charset="-78"/>
                 <a:cs typeface="Amiri" pitchFamily="2" charset="-78"/>
               </a:rPr>
               <a:t>صَحِيحٌ أَنَّ التِّكْنُولُوجْيَا نِعْمَةٌ كَبِيرَةٌ، غَيْرَ أَنَّ الإِفْرَاطَ فِي اسْتِخْدَامِهَا يَسْرِقُ مِنَّا الوَقْتَ وَالتَّرْكِيزَ. وَلَوْ خَصَّصَ كُلُّ وَاحِدٍ مِنَّا سَاعَةً يَوْمِيًّا بِلَا شَاشَاتٍ، لَشَعَرْنَا بِفَرْقٍ كَبِيرٍ فِي صِحَّتِنَا وَعَلَاقَاتِنَا.</a:t>
@@ -9511,11 +9580,12 @@
               <a:buNone/>
             </a:pPr>
             <a:r>
-              <a:rPr lang="en-US" sz="950" b="1" dirty="0">
+              <a:rPr lang="ar-SA" sz="950" b="1" dirty="0">
                 <a:solidFill>
                   <a:srgbClr val="FFFFFF"/>
                 </a:solidFill>
                 <a:latin typeface="Calibri" pitchFamily="34" charset="0"/>
+                <a:ea typeface="Amiri" pitchFamily="2" charset="-78"/>
                 <a:cs typeface="Amiri" pitchFamily="2" charset="-78"/>
               </a:rPr>
               <a:t>بِمَا أَنِّي</a:t>
@@ -9576,11 +9646,12 @@
               <a:buNone/>
             </a:pPr>
             <a:r>
-              <a:rPr lang="en-US" sz="950" b="1" dirty="0">
+              <a:rPr lang="ar-SA" sz="950" b="1" dirty="0">
                 <a:solidFill>
                   <a:srgbClr val="FFFFFF"/>
                 </a:solidFill>
                 <a:latin typeface="Calibri" pitchFamily="34" charset="0"/>
+                <a:ea typeface="Amiri" pitchFamily="2" charset="-78"/>
                 <a:cs typeface="Amiri" pitchFamily="2" charset="-78"/>
               </a:rPr>
               <a:t>كَأَنَّنَا نَعِيشُ</a:t>
@@ -9641,11 +9712,12 @@
               <a:buNone/>
             </a:pPr>
             <a:r>
-              <a:rPr lang="en-US" sz="950" b="1" dirty="0">
+              <a:rPr lang="ar-SA" sz="950" b="1" dirty="0">
                 <a:solidFill>
                   <a:srgbClr val="FFFFFF"/>
                 </a:solidFill>
                 <a:latin typeface="Calibri" pitchFamily="34" charset="0"/>
+                <a:ea typeface="Amiri" pitchFamily="2" charset="-78"/>
                 <a:cs typeface="Amiri" pitchFamily="2" charset="-78"/>
               </a:rPr>
               <a:t>نِمْتُ أَعْمَقَ مِمَّا</a:t>
@@ -9706,11 +9778,12 @@
               <a:buNone/>
             </a:pPr>
             <a:r>
-              <a:rPr lang="en-US" sz="950" b="1" dirty="0">
+              <a:rPr lang="ar-SA" sz="950" b="1" dirty="0">
                 <a:solidFill>
                   <a:srgbClr val="FFFFFF"/>
                 </a:solidFill>
                 <a:latin typeface="Calibri" pitchFamily="34" charset="0"/>
+                <a:ea typeface="Amiri" pitchFamily="2" charset="-78"/>
                 <a:cs typeface="Amiri" pitchFamily="2" charset="-78"/>
               </a:rPr>
               <a:t>لَوْ خَصَّصَ … لَشَعَرْنَا</a:t>
@@ -9844,6 +9917,7 @@
                   <a:srgbClr val="D4AF37"/>
                 </a:solidFill>
                 <a:latin typeface="Amiri" pitchFamily="2" charset="-78"/>
+                <a:ea typeface="Amiri" pitchFamily="2" charset="-78"/>
                 <a:cs typeface="Amiri" pitchFamily="2" charset="-78"/>
               </a:rPr>
               <a:t>م</a:t>
@@ -10101,6 +10175,7 @@
                   <a:srgbClr val="8A6D1E"/>
                 </a:solidFill>
                 <a:latin typeface="Amiri" pitchFamily="2" charset="-78"/>
+                <a:ea typeface="Amiri" pitchFamily="2" charset="-78"/>
                 <a:cs typeface="Amiri" pitchFamily="2" charset="-78"/>
               </a:rPr>
               <a:t>ب</a:t>
@@ -10165,6 +10240,7 @@
                   <a:srgbClr val="1B3B6F"/>
                 </a:solidFill>
                 <a:latin typeface="Amiri" pitchFamily="2" charset="-78"/>
+                <a:ea typeface="Amiri" pitchFamily="2" charset="-78"/>
                 <a:cs typeface="Amiri" pitchFamily="2" charset="-78"/>
               </a:rPr>
               <a:t>ب</a:t>
@@ -10216,6 +10292,7 @@
                   <a:srgbClr val="8A6D1E"/>
                 </a:solidFill>
                 <a:latin typeface="Amiri" pitchFamily="2" charset="-78"/>
+                <a:ea typeface="Amiri" pitchFamily="2" charset="-78"/>
                 <a:cs typeface="Amiri" pitchFamily="2" charset="-78"/>
               </a:rPr>
               <a:t>نَمُوذَجُ الإِجَابَةِ</a:t>
@@ -10329,6 +10406,7 @@
                   <a:srgbClr val="1F2A37"/>
                 </a:solidFill>
                 <a:latin typeface="Amiri" pitchFamily="2" charset="-78"/>
+                <a:ea typeface="Amiri" pitchFamily="2" charset="-78"/>
                 <a:cs typeface="Amiri" pitchFamily="2" charset="-78"/>
               </a:rPr>
               <a:t>أَصْبَحَتْ وَسَائِلُ التَّوَاصُلِ الاجْتِمَاعِيِّ جُزْءًا لَا يَتَجَزَّأُ مِنْ حَيَاةِ المُرَاهِقِينَ؛ فَمُعْظَمُنَا يَفْتَحُ هَاتِفَهُ قَبْلَ أَنْ يَفْتَحَ عَيْنَيْهِ تَمَامًا فِي الصَّبَاحِ. فَهَلْ هِيَ صَدِيقٌ مُفِيدٌ أَمْ عَدُوٌّ خَفِيٌّ؟</a:t>
@@ -10348,6 +10426,7 @@
                   <a:srgbClr val="1F2A37"/>
                 </a:solidFill>
                 <a:latin typeface="Amiri" pitchFamily="2" charset="-78"/>
+                <a:ea typeface="Amiri" pitchFamily="2" charset="-78"/>
                 <a:cs typeface="Amiri" pitchFamily="2" charset="-78"/>
               </a:rPr>
               <a:t>مِنْ نَاحِيَةٍ، تُتِيحُ لَنَا هٰذِهِ الوَسَائِلُ التَّعَلُّمَ وَالتَّعْبِيرَ عَنْ آرَائِنَا، وَتَجْمَعُنَا بِأَشْخَاصٍ يُشَارِكُونَنَا الهِوَايَاتِ نَفْسَهَا، كَمَا تُسَاعِدُ المُبْدِعِينَ الصِّغَارَ عَلَى نَشْرِ أَعْمَالِهِمْ. وَمِنْ نَاحِيَةٍ أُخْرَى، تُؤَدِّي المُقَارَنَةُ الدَّائِمَةُ بِالصُّوَرِ المِثَالِيَّةِ إِلَى القَلَقِ وَقِلَّةِ الثِّقَةِ بِالنَّفْسِ، فَضْلًا عَنِ التَّنَمُّرِ الإِلِكْتْرُونِيِّ.</a:t>
@@ -10367,6 +10446,7 @@
                   <a:srgbClr val="1F2A37"/>
                 </a:solidFill>
                 <a:latin typeface="Amiri" pitchFamily="2" charset="-78"/>
+                <a:ea typeface="Amiri" pitchFamily="2" charset="-78"/>
                 <a:cs typeface="Amiri" pitchFamily="2" charset="-78"/>
               </a:rPr>
               <a:t>وَقَدْ عَرَفْتُ ذٰلِكَ مِنْ تَجْرِبَةِ صَدِيقَةٍ لِي، كَانَتْ تَنْشُرُ صُوَرَهَا كُلَّ يَوْمٍ وَتَنْتَظِرُ الإِعْجَابَاتِ بِقَلَقٍ. وَعِنْدَمَا كَتَبَ لَهَا أَحَدُهُمْ تَعْلِيقًا جَارِحًا، حَزِنَتْ أَيَّامًا، إِلَى أَنْ قَرَّرَتْ حَذْفَ التَّطْبِيقِ شَهْرًا كَامِلًا، فَعَادَتْ إِلَيْهَا ابْتِسَامَتُهَا، وَأَصْبَحَتْ تَقْضِي وَقْتَهَا فِي الرَّسْمِ وَالقِرَاءَةِ.</a:t>
@@ -10386,6 +10466,7 @@
                   <a:srgbClr val="1F2A37"/>
                 </a:solidFill>
                 <a:latin typeface="Amiri" pitchFamily="2" charset="-78"/>
+                <a:ea typeface="Amiri" pitchFamily="2" charset="-78"/>
                 <a:cs typeface="Amiri" pitchFamily="2" charset="-78"/>
               </a:rPr>
               <a:t>صَحِيحٌ أَنَّ المَنْعَ لَيْسَ حَلًّا، غَيْرَ أَنَّ الاسْتِخْدَامَ الوَاعِيَ ضَرُورِيٌّ. وَإِذَا تَعَلَّمْنَا مُنْذُ الصِّغَرِ كَيْفَ نَحْمِي أَنْفُسَنَا، فَسَتُصْبِحُ هٰذِهِ الوَسَائِلُ أَدَاةً بِأَيْدِينَا، لَا قُيُودًا حَوْلَ أَعْنَاقِنَا.</a:t>
@@ -10484,11 +10565,12 @@
               <a:buNone/>
             </a:pPr>
             <a:r>
-              <a:rPr lang="en-US" sz="950" b="1" dirty="0">
+              <a:rPr lang="ar-SA" sz="950" b="1" dirty="0">
                 <a:solidFill>
                   <a:srgbClr val="FFFFFF"/>
                 </a:solidFill>
                 <a:latin typeface="Calibri" pitchFamily="34" charset="0"/>
+                <a:ea typeface="Amiri" pitchFamily="2" charset="-78"/>
                 <a:cs typeface="Amiri" pitchFamily="2" charset="-78"/>
               </a:rPr>
               <a:t>جُزْءًا لَا يَتَجَزَّأُ</a:t>
@@ -10549,11 +10631,12 @@
               <a:buNone/>
             </a:pPr>
             <a:r>
-              <a:rPr lang="en-US" sz="950" b="1" dirty="0">
+              <a:rPr lang="ar-SA" sz="950" b="1" dirty="0">
                 <a:solidFill>
                   <a:srgbClr val="FFFFFF"/>
                 </a:solidFill>
                 <a:latin typeface="Calibri" pitchFamily="34" charset="0"/>
+                <a:ea typeface="Amiri" pitchFamily="2" charset="-78"/>
                 <a:cs typeface="Amiri" pitchFamily="2" charset="-78"/>
               </a:rPr>
               <a:t>تُؤَدِّي المُقَارَنَةُ … إِلَى</a:t>
@@ -10614,11 +10697,12 @@
               <a:buNone/>
             </a:pPr>
             <a:r>
-              <a:rPr lang="en-US" sz="950" b="1" dirty="0">
+              <a:rPr lang="ar-SA" sz="950" b="1" dirty="0">
                 <a:solidFill>
                   <a:srgbClr val="FFFFFF"/>
                 </a:solidFill>
                 <a:latin typeface="Calibri" pitchFamily="34" charset="0"/>
+                <a:ea typeface="Amiri" pitchFamily="2" charset="-78"/>
                 <a:cs typeface="Amiri" pitchFamily="2" charset="-78"/>
               </a:rPr>
               <a:t>فَضْلًا عَنْ</a:t>
@@ -10679,11 +10763,12 @@
               <a:buNone/>
             </a:pPr>
             <a:r>
-              <a:rPr lang="en-US" sz="950" b="1" dirty="0">
+              <a:rPr lang="ar-SA" sz="950" b="1" dirty="0">
                 <a:solidFill>
                   <a:srgbClr val="FFFFFF"/>
                 </a:solidFill>
                 <a:latin typeface="Calibri" pitchFamily="34" charset="0"/>
+                <a:ea typeface="Amiri" pitchFamily="2" charset="-78"/>
                 <a:cs typeface="Amiri" pitchFamily="2" charset="-78"/>
               </a:rPr>
               <a:t>إِذَا تَعَلَّمْنَا … فَسَتُصْبِحُ</a:t>
@@ -10817,6 +10902,7 @@
                   <a:srgbClr val="D4AF37"/>
                 </a:solidFill>
                 <a:latin typeface="Amiri" pitchFamily="2" charset="-78"/>
+                <a:ea typeface="Amiri" pitchFamily="2" charset="-78"/>
                 <a:cs typeface="Amiri" pitchFamily="2" charset="-78"/>
               </a:rPr>
               <a:t>م</a:t>
@@ -11137,6 +11223,7 @@
                   <a:srgbClr val="8A6D1E"/>
                 </a:solidFill>
                 <a:latin typeface="Amiri" pitchFamily="2" charset="-78"/>
+                <a:ea typeface="Amiri" pitchFamily="2" charset="-78"/>
                 <a:cs typeface="Amiri" pitchFamily="2" charset="-78"/>
               </a:rPr>
               <a:t>قَيِّمْ عَمَلَكَ</a:t>
@@ -12381,6 +12468,7 @@
                   <a:srgbClr val="FFFFFF"/>
                 </a:solidFill>
                 <a:latin typeface="Amiri" pitchFamily="2" charset="-78"/>
+                <a:ea typeface="Amiri" pitchFamily="2" charset="-78"/>
                 <a:cs typeface="Amiri" pitchFamily="2" charset="-78"/>
               </a:rPr>
               <a:t>أَحْسَنْتُمْ! إِلَى اللِّقَاءِ</a:t>
@@ -12533,6 +12621,7 @@
                   <a:srgbClr val="D4AF37"/>
                 </a:solidFill>
                 <a:latin typeface="Amiri" pitchFamily="2" charset="-78"/>
+                <a:ea typeface="Amiri" pitchFamily="2" charset="-78"/>
                 <a:cs typeface="Amiri" pitchFamily="2" charset="-78"/>
               </a:rPr>
               <a:t>وَرْشَةُ التَّدْرِيبِ</a:t>
@@ -12666,6 +12755,7 @@
                   <a:srgbClr val="D4AF37"/>
                 </a:solidFill>
                 <a:latin typeface="Amiri" pitchFamily="2" charset="-78"/>
+                <a:ea typeface="Amiri" pitchFamily="2" charset="-78"/>
                 <a:cs typeface="Amiri" pitchFamily="2" charset="-78"/>
               </a:rPr>
               <a:t>م</a:t>
@@ -12986,6 +13076,7 @@
                   <a:srgbClr val="8A6D1E"/>
                 </a:solidFill>
                 <a:latin typeface="Amiri" pitchFamily="2" charset="-78"/>
+                <a:ea typeface="Amiri" pitchFamily="2" charset="-78"/>
                 <a:cs typeface="Amiri" pitchFamily="2" charset="-78"/>
               </a:rPr>
               <a:t>آدَابُ الصَّفِّ</a:t>
@@ -14517,6 +14608,7 @@
                   <a:srgbClr val="D4AF37"/>
                 </a:solidFill>
                 <a:latin typeface="Amiri" pitchFamily="2" charset="-78"/>
+                <a:ea typeface="Amiri" pitchFamily="2" charset="-78"/>
                 <a:cs typeface="Amiri" pitchFamily="2" charset="-78"/>
               </a:rPr>
               <a:t>م</a:t>
@@ -14837,6 +14929,7 @@
                   <a:srgbClr val="8A6D1E"/>
                 </a:solidFill>
                 <a:latin typeface="Amiri" pitchFamily="2" charset="-78"/>
+                <a:ea typeface="Amiri" pitchFamily="2" charset="-78"/>
                 <a:cs typeface="Amiri" pitchFamily="2" charset="-78"/>
               </a:rPr>
               <a:t>خَرِيطَةُ الوَرْشَةِ</a:t>
@@ -15151,6 +15244,7 @@
                   <a:srgbClr val="1B3B6F"/>
                 </a:solidFill>
                 <a:latin typeface="Amiri" pitchFamily="2" charset="-78"/>
+                <a:ea typeface="Amiri" pitchFamily="2" charset="-78"/>
                 <a:cs typeface="Amiri" pitchFamily="2" charset="-78"/>
               </a:rPr>
               <a:t>كَيْفَ</a:t>
@@ -15427,6 +15521,7 @@
                   <a:srgbClr val="1E6B52"/>
                 </a:solidFill>
                 <a:latin typeface="Amiri" pitchFamily="2" charset="-78"/>
+                <a:ea typeface="Amiri" pitchFamily="2" charset="-78"/>
                 <a:cs typeface="Amiri" pitchFamily="2" charset="-78"/>
               </a:rPr>
               <a:t>الاسْتِمَارَةُ</a:t>
@@ -15703,6 +15798,7 @@
                   <a:srgbClr val="1E6B52"/>
                 </a:solidFill>
                 <a:latin typeface="Amiri" pitchFamily="2" charset="-78"/>
+                <a:ea typeface="Amiri" pitchFamily="2" charset="-78"/>
                 <a:cs typeface="Amiri" pitchFamily="2" charset="-78"/>
               </a:rPr>
               <a:t>الرِّسَالَةُ</a:t>
@@ -15979,6 +16075,7 @@
                   <a:srgbClr val="1E6B52"/>
                 </a:solidFill>
                 <a:latin typeface="Amiri" pitchFamily="2" charset="-78"/>
+                <a:ea typeface="Amiri" pitchFamily="2" charset="-78"/>
                 <a:cs typeface="Amiri" pitchFamily="2" charset="-78"/>
               </a:rPr>
               <a:t>المَقَالُ</a:t>
@@ -16255,6 +16352,7 @@
                   <a:srgbClr val="8A6D1E"/>
                 </a:solidFill>
                 <a:latin typeface="Amiri" pitchFamily="2" charset="-78"/>
+                <a:ea typeface="Amiri" pitchFamily="2" charset="-78"/>
                 <a:cs typeface="Amiri" pitchFamily="2" charset="-78"/>
               </a:rPr>
               <a:t>قَيِّمْ</a:t>
@@ -16498,6 +16596,7 @@
                   <a:srgbClr val="D4AF37"/>
                 </a:solidFill>
                 <a:latin typeface="Amiri" pitchFamily="2" charset="-78"/>
+                <a:ea typeface="Amiri" pitchFamily="2" charset="-78"/>
                 <a:cs typeface="Amiri" pitchFamily="2" charset="-78"/>
               </a:rPr>
               <a:t>م</a:t>
@@ -16818,6 +16917,7 @@
                   <a:srgbClr val="8A6D1E"/>
                 </a:solidFill>
                 <a:latin typeface="Amiri" pitchFamily="2" charset="-78"/>
+                <a:ea typeface="Amiri" pitchFamily="2" charset="-78"/>
                 <a:cs typeface="Amiri" pitchFamily="2" charset="-78"/>
               </a:rPr>
               <a:t>امْتِحَانُ الكِتَابَةِ</a:t>
@@ -17442,6 +17542,7 @@
                   <a:srgbClr val="1B3B6F"/>
                 </a:solidFill>
                 <a:latin typeface="Amiri" pitchFamily="2" charset="-78"/>
+                <a:ea typeface="Amiri" pitchFamily="2" charset="-78"/>
                 <a:cs typeface="Amiri" pitchFamily="2" charset="-78"/>
               </a:rPr>
               <a:t>أَتَوَاصَلُ مَعَ أَقَارِبِي وَأُعَلِّقُ عَلَى صُوَرِهِمْ</a:t>
@@ -17541,6 +17642,7 @@
                   <a:srgbClr val="1B3B6F"/>
                 </a:solidFill>
                 <a:latin typeface="Amiri" pitchFamily="2" charset="-78"/>
+                <a:ea typeface="Amiri" pitchFamily="2" charset="-78"/>
                 <a:cs typeface="Amiri" pitchFamily="2" charset="-78"/>
               </a:rPr>
               <a:t>الإِفْرَاطُ فِي اسْتِخْدَامِهَا</a:t>
@@ -17640,6 +17742,7 @@
                   <a:srgbClr val="1B3B6F"/>
                 </a:solidFill>
                 <a:latin typeface="Amiri" pitchFamily="2" charset="-78"/>
+                <a:ea typeface="Amiri" pitchFamily="2" charset="-78"/>
                 <a:cs typeface="Amiri" pitchFamily="2" charset="-78"/>
               </a:rPr>
               <a:t>مِنْ نَاحِيَةٍ … وَمِنْ نَاحِيَةٍ أُخْرَى …</a:t>
@@ -17811,6 +17914,7 @@
                   <a:srgbClr val="D4AF37"/>
                 </a:solidFill>
                 <a:latin typeface="Amiri" pitchFamily="2" charset="-78"/>
+                <a:ea typeface="Amiri" pitchFamily="2" charset="-78"/>
                 <a:cs typeface="Amiri" pitchFamily="2" charset="-78"/>
               </a:rPr>
               <a:t>م</a:t>
@@ -18131,6 +18235,7 @@
                   <a:srgbClr val="8A6D1E"/>
                 </a:solidFill>
                 <a:latin typeface="Amiri" pitchFamily="2" charset="-78"/>
+                <a:ea typeface="Amiri" pitchFamily="2" charset="-78"/>
                 <a:cs typeface="Amiri" pitchFamily="2" charset="-78"/>
               </a:rPr>
               <a:t>اسْتِمَارَةُ الأَمَانِ الرَّقْمِيِّ</a:t>
@@ -18487,6 +18592,7 @@
                   <a:srgbClr val="1B3B6F"/>
                 </a:solidFill>
                 <a:latin typeface="Amiri" pitchFamily="2" charset="-78"/>
+                <a:ea typeface="Amiri" pitchFamily="2" charset="-78"/>
                 <a:cs typeface="Amiri" pitchFamily="2" charset="-78"/>
               </a:rPr>
               <a:t>الاسْمُ وَالصَّفُّ</a:t>
@@ -18731,6 +18837,7 @@
                   <a:srgbClr val="1B3B6F"/>
                 </a:solidFill>
                 <a:latin typeface="Amiri" pitchFamily="2" charset="-78"/>
+                <a:ea typeface="Amiri" pitchFamily="2" charset="-78"/>
                 <a:cs typeface="Amiri" pitchFamily="2" charset="-78"/>
               </a:rPr>
               <a:t>الأَجْهِزَةُ الَّتِي تَسْتَخْدِمُهَا</a:t>
@@ -18975,6 +19082,7 @@
                   <a:srgbClr val="1B3B6F"/>
                 </a:solidFill>
                 <a:latin typeface="Amiri" pitchFamily="2" charset="-78"/>
+                <a:ea typeface="Amiri" pitchFamily="2" charset="-78"/>
                 <a:cs typeface="Amiri" pitchFamily="2" charset="-78"/>
               </a:rPr>
               <a:t>عَدَدُ السَّاعَاتِ يَوْمِيًّا</a:t>
@@ -19219,6 +19327,7 @@
                   <a:srgbClr val="1B3B6F"/>
                 </a:solidFill>
                 <a:latin typeface="Amiri" pitchFamily="2" charset="-78"/>
+                <a:ea typeface="Amiri" pitchFamily="2" charset="-78"/>
                 <a:cs typeface="Amiri" pitchFamily="2" charset="-78"/>
               </a:rPr>
               <a:t>تَطْبِيقُكَ المُفَضَّلُ</a:t>
@@ -19463,6 +19572,7 @@
                   <a:srgbClr val="1B3B6F"/>
                 </a:solidFill>
                 <a:latin typeface="Amiri" pitchFamily="2" charset="-78"/>
+                <a:ea typeface="Amiri" pitchFamily="2" charset="-78"/>
                 <a:cs typeface="Amiri" pitchFamily="2" charset="-78"/>
               </a:rPr>
               <a:t>لِمَاذَا تَسْتَخْدِمُ الإِنْتَرْنِتَ؟</a:t>
@@ -19707,6 +19817,7 @@
                   <a:srgbClr val="1B3B6F"/>
                 </a:solidFill>
                 <a:latin typeface="Amiri" pitchFamily="2" charset="-78"/>
+                <a:ea typeface="Amiri" pitchFamily="2" charset="-78"/>
                 <a:cs typeface="Amiri" pitchFamily="2" charset="-78"/>
               </a:rPr>
               <a:t>مَعَ مَنْ تَتَوَاصَلُ؟</a:t>
@@ -19951,6 +20062,7 @@
                   <a:srgbClr val="1B3B6F"/>
                 </a:solidFill>
                 <a:latin typeface="Amiri" pitchFamily="2" charset="-78"/>
+                <a:ea typeface="Amiri" pitchFamily="2" charset="-78"/>
                 <a:cs typeface="Amiri" pitchFamily="2" charset="-78"/>
               </a:rPr>
               <a:t>قَاعِدَةٌ لِلْأَمَانِ تَتْبَعُهَا</a:t>
@@ -20130,6 +20242,7 @@
                   <a:srgbClr val="1B3B6F"/>
                 </a:solidFill>
                 <a:latin typeface="Amiri" pitchFamily="2" charset="-78"/>
+                <a:ea typeface="Amiri" pitchFamily="2" charset="-78"/>
                 <a:cs typeface="Amiri" pitchFamily="2" charset="-78"/>
               </a:rPr>
               <a:t>جُمْلَةٌ: مَاذَا تَفْعَلُ إِذَا رَأَيْتَ تَعْلِيقًا مُسِيئًا؟</a:t>
@@ -20339,6 +20452,7 @@
                   <a:srgbClr val="D4AF37"/>
                 </a:solidFill>
                 <a:latin typeface="Amiri" pitchFamily="2" charset="-78"/>
+                <a:ea typeface="Amiri" pitchFamily="2" charset="-78"/>
                 <a:cs typeface="Amiri" pitchFamily="2" charset="-78"/>
               </a:rPr>
               <a:t>م</a:t>
@@ -20659,6 +20773,7 @@
                   <a:srgbClr val="8A6D1E"/>
                 </a:solidFill>
                 <a:latin typeface="Amiri" pitchFamily="2" charset="-78"/>
+                <a:ea typeface="Amiri" pitchFamily="2" charset="-78"/>
                 <a:cs typeface="Amiri" pitchFamily="2" charset="-78"/>
               </a:rPr>
               <a:t>نَمُوذَجُ الإِجَابَةِ</a:t>
@@ -20977,6 +21092,7 @@
                   <a:srgbClr val="1B3B6F"/>
                 </a:solidFill>
                 <a:latin typeface="Amiri" pitchFamily="2" charset="-78"/>
+                <a:ea typeface="Amiri" pitchFamily="2" charset="-78"/>
                 <a:cs typeface="Amiri" pitchFamily="2" charset="-78"/>
               </a:rPr>
               <a:t>سَامِي خَلِيلٌ، الصَّفُّ العَاشِرُ</a:t>
@@ -21015,6 +21131,7 @@
                   <a:srgbClr val="1B3B6F"/>
                 </a:solidFill>
                 <a:latin typeface="Amiri" pitchFamily="2" charset="-78"/>
+                <a:ea typeface="Amiri" pitchFamily="2" charset="-78"/>
                 <a:cs typeface="Amiri" pitchFamily="2" charset="-78"/>
               </a:rPr>
               <a:t>الاسْمُ وَالصَّفُّ</a:t>
@@ -21156,6 +21273,7 @@
                   <a:srgbClr val="1B3B6F"/>
                 </a:solidFill>
                 <a:latin typeface="Amiri" pitchFamily="2" charset="-78"/>
+                <a:ea typeface="Amiri" pitchFamily="2" charset="-78"/>
                 <a:cs typeface="Amiri" pitchFamily="2" charset="-78"/>
               </a:rPr>
               <a:t>هَاتِفٌ ذَكِيٌّ وَحَاسُوبٌ</a:t>
@@ -21194,6 +21312,7 @@
                   <a:srgbClr val="1B3B6F"/>
                 </a:solidFill>
                 <a:latin typeface="Amiri" pitchFamily="2" charset="-78"/>
+                <a:ea typeface="Amiri" pitchFamily="2" charset="-78"/>
                 <a:cs typeface="Amiri" pitchFamily="2" charset="-78"/>
               </a:rPr>
               <a:t>الأَجْهِزَةُ الَّتِي تَسْتَخْدِمُهَا</a:t>
@@ -21335,6 +21454,7 @@
                   <a:srgbClr val="1B3B6F"/>
                 </a:solidFill>
                 <a:latin typeface="Amiri" pitchFamily="2" charset="-78"/>
+                <a:ea typeface="Amiri" pitchFamily="2" charset="-78"/>
                 <a:cs typeface="Amiri" pitchFamily="2" charset="-78"/>
               </a:rPr>
               <a:t>ثَلَاثُ سَاعَاتٍ</a:t>
@@ -21373,6 +21493,7 @@
                   <a:srgbClr val="1B3B6F"/>
                 </a:solidFill>
                 <a:latin typeface="Amiri" pitchFamily="2" charset="-78"/>
+                <a:ea typeface="Amiri" pitchFamily="2" charset="-78"/>
                 <a:cs typeface="Amiri" pitchFamily="2" charset="-78"/>
               </a:rPr>
               <a:t>عَدَدُ السَّاعَاتِ يَوْمِيًّا</a:t>
@@ -21514,6 +21635,7 @@
                   <a:srgbClr val="1B3B6F"/>
                 </a:solidFill>
                 <a:latin typeface="Amiri" pitchFamily="2" charset="-78"/>
+                <a:ea typeface="Amiri" pitchFamily="2" charset="-78"/>
                 <a:cs typeface="Amiri" pitchFamily="2" charset="-78"/>
               </a:rPr>
               <a:t>تَطْبِيقُ خَرَائِطَ</a:t>
@@ -21552,6 +21674,7 @@
                   <a:srgbClr val="1B3B6F"/>
                 </a:solidFill>
                 <a:latin typeface="Amiri" pitchFamily="2" charset="-78"/>
+                <a:ea typeface="Amiri" pitchFamily="2" charset="-78"/>
                 <a:cs typeface="Amiri" pitchFamily="2" charset="-78"/>
               </a:rPr>
               <a:t>تَطْبِيقُكَ المُفَضَّلُ</a:t>
@@ -21693,6 +21816,7 @@
                   <a:srgbClr val="1B3B6F"/>
                 </a:solidFill>
                 <a:latin typeface="Amiri" pitchFamily="2" charset="-78"/>
+                <a:ea typeface="Amiri" pitchFamily="2" charset="-78"/>
                 <a:cs typeface="Amiri" pitchFamily="2" charset="-78"/>
               </a:rPr>
               <a:t>لِلدِّرَاسَةِ وَالتَّوَاصُلِ</a:t>
@@ -21731,6 +21855,7 @@
                   <a:srgbClr val="1B3B6F"/>
                 </a:solidFill>
                 <a:latin typeface="Amiri" pitchFamily="2" charset="-78"/>
+                <a:ea typeface="Amiri" pitchFamily="2" charset="-78"/>
                 <a:cs typeface="Amiri" pitchFamily="2" charset="-78"/>
               </a:rPr>
               <a:t>لِمَاذَا تَسْتَخْدِمُ الإِنْتَرْنِتَ؟</a:t>
@@ -21872,6 +21997,7 @@
                   <a:srgbClr val="1B3B6F"/>
                 </a:solidFill>
                 <a:latin typeface="Amiri" pitchFamily="2" charset="-78"/>
+                <a:ea typeface="Amiri" pitchFamily="2" charset="-78"/>
                 <a:cs typeface="Amiri" pitchFamily="2" charset="-78"/>
               </a:rPr>
               <a:t>مَعَ أَصْدِقَائِي وَأَقَارِبِي</a:t>
@@ -21910,6 +22036,7 @@
                   <a:srgbClr val="1B3B6F"/>
                 </a:solidFill>
                 <a:latin typeface="Amiri" pitchFamily="2" charset="-78"/>
+                <a:ea typeface="Amiri" pitchFamily="2" charset="-78"/>
                 <a:cs typeface="Amiri" pitchFamily="2" charset="-78"/>
               </a:rPr>
               <a:t>مَعَ مَنْ تَتَوَاصَلُ؟</a:t>
@@ -22051,6 +22178,7 @@
                   <a:srgbClr val="1B3B6F"/>
                 </a:solidFill>
                 <a:latin typeface="Amiri" pitchFamily="2" charset="-78"/>
+                <a:ea typeface="Amiri" pitchFamily="2" charset="-78"/>
                 <a:cs typeface="Amiri" pitchFamily="2" charset="-78"/>
               </a:rPr>
               <a:t>لَا أَنْشُرُ عُنْوَانِي</a:t>
@@ -22089,6 +22217,7 @@
                   <a:srgbClr val="1B3B6F"/>
                 </a:solidFill>
                 <a:latin typeface="Amiri" pitchFamily="2" charset="-78"/>
+                <a:ea typeface="Amiri" pitchFamily="2" charset="-78"/>
                 <a:cs typeface="Amiri" pitchFamily="2" charset="-78"/>
               </a:rPr>
               <a:t>قَاعِدَةٌ لِلْأَمَانِ تَتْبَعُهَا</a:t>
@@ -22230,6 +22359,7 @@
                   <a:srgbClr val="1B3B6F"/>
                 </a:solidFill>
                 <a:latin typeface="Amiri" pitchFamily="2" charset="-78"/>
+                <a:ea typeface="Amiri" pitchFamily="2" charset="-78"/>
                 <a:cs typeface="Amiri" pitchFamily="2" charset="-78"/>
               </a:rPr>
               <a:t>إِذَا رَأَيْتُ تَعْلِيقًا مُسِيئًا، فَأَحْظُرُ صَاحِبَهُ وَأُخْبِرُ مُعَلِّمِي.</a:t>
@@ -22268,6 +22398,7 @@
                   <a:srgbClr val="1B3B6F"/>
                 </a:solidFill>
                 <a:latin typeface="Amiri" pitchFamily="2" charset="-78"/>
+                <a:ea typeface="Amiri" pitchFamily="2" charset="-78"/>
                 <a:cs typeface="Amiri" pitchFamily="2" charset="-78"/>
               </a:rPr>
               <a:t>جُمْلَةٌ: مَاذَا تَفْعَلُ إِذَا رَأَيْتَ تَعْلِيقًا مُسِيئًا؟</a:t>
@@ -22477,6 +22608,7 @@
                   <a:srgbClr val="D4AF37"/>
                 </a:solidFill>
                 <a:latin typeface="Amiri" pitchFamily="2" charset="-78"/>
+                <a:ea typeface="Amiri" pitchFamily="2" charset="-78"/>
                 <a:cs typeface="Amiri" pitchFamily="2" charset="-78"/>
               </a:rPr>
               <a:t>م</a:t>
@@ -22797,6 +22929,7 @@
                   <a:srgbClr val="8A6D1E"/>
                 </a:solidFill>
                 <a:latin typeface="Amiri" pitchFamily="2" charset="-78"/>
+                <a:ea typeface="Amiri" pitchFamily="2" charset="-78"/>
                 <a:cs typeface="Amiri" pitchFamily="2" charset="-78"/>
               </a:rPr>
               <a:t>حَيَاتِي الرَّقْمِيَّةُ</a:t>
@@ -23272,6 +23405,7 @@
                   <a:srgbClr val="1B3B6F"/>
                 </a:solidFill>
                 <a:latin typeface="Amiri" pitchFamily="2" charset="-78"/>
+                <a:ea typeface="Amiri" pitchFamily="2" charset="-78"/>
                 <a:cs typeface="Amiri" pitchFamily="2" charset="-78"/>
               </a:rPr>
               <a:t>أَسْتَخْدِمُ هَاتِفِي … سَاعَاتٍ</a:t>
@@ -23348,6 +23482,7 @@
                   <a:srgbClr val="1B3B6F"/>
                 </a:solidFill>
                 <a:latin typeface="Amiri" pitchFamily="2" charset="-78"/>
+                <a:ea typeface="Amiri" pitchFamily="2" charset="-78"/>
                 <a:cs typeface="Amiri" pitchFamily="2" charset="-78"/>
               </a:rPr>
               <a:t>أَتَوَاصَلُ مَعَ …</a:t>
@@ -23424,6 +23559,7 @@
                   <a:srgbClr val="1B3B6F"/>
                 </a:solidFill>
                 <a:latin typeface="Amiri" pitchFamily="2" charset="-78"/>
+                <a:ea typeface="Amiri" pitchFamily="2" charset="-78"/>
                 <a:cs typeface="Amiri" pitchFamily="2" charset="-78"/>
               </a:rPr>
               <a:t>فِي الأُسْبُوعِ المَاضِي نَسِيتُ / تَعَطَّلَ …</a:t>
@@ -23500,6 +23636,7 @@
                   <a:srgbClr val="1B3B6F"/>
                 </a:solidFill>
                 <a:latin typeface="Amiri" pitchFamily="2" charset="-78"/>
+                <a:ea typeface="Amiri" pitchFamily="2" charset="-78"/>
                 <a:cs typeface="Amiri" pitchFamily="2" charset="-78"/>
               </a:rPr>
               <a:t>فِي المُسْتَقْبَلِ سَأَسْتَخْدِمُ … أَقَلَّ</a:t>
@@ -23671,6 +23808,7 @@
                   <a:srgbClr val="D4AF37"/>
                 </a:solidFill>
                 <a:latin typeface="Amiri" pitchFamily="2" charset="-78"/>
+                <a:ea typeface="Amiri" pitchFamily="2" charset="-78"/>
                 <a:cs typeface="Amiri" pitchFamily="2" charset="-78"/>
               </a:rPr>
               <a:t>م</a:t>
@@ -23991,6 +24129,7 @@
                   <a:srgbClr val="8A6D1E"/>
                 </a:solidFill>
                 <a:latin typeface="Amiri" pitchFamily="2" charset="-78"/>
+                <a:ea typeface="Amiri" pitchFamily="2" charset="-78"/>
                 <a:cs typeface="Amiri" pitchFamily="2" charset="-78"/>
               </a:rPr>
               <a:t>نَصُّ السُّؤَالِ</a:t>
@@ -24271,6 +24410,7 @@
                   <a:srgbClr val="1B3B6F"/>
                 </a:solidFill>
                 <a:latin typeface="Amiri" pitchFamily="2" charset="-78"/>
+                <a:ea typeface="Amiri" pitchFamily="2" charset="-78"/>
                 <a:cs typeface="Amiri" pitchFamily="2" charset="-78"/>
               </a:rPr>
               <a:t>سَأَلَكَ صَدِيقُكَ عَنِ اسْتِخْدَامِكَ لِلتِّكْنُولُوجْيَا. اكْتُبْ رِسَالَةً (٨٠–٩٠ كَلِمَةً).</a:t>
@@ -24412,6 +24552,7 @@
                   <a:srgbClr val="1B3B6F"/>
                 </a:solidFill>
                 <a:latin typeface="Amiri" pitchFamily="2" charset="-78"/>
+                <a:ea typeface="Amiri" pitchFamily="2" charset="-78"/>
                 <a:cs typeface="Amiri" pitchFamily="2" charset="-78"/>
               </a:rPr>
               <a:t>كَمْ سَاعَةً تَسْتَخْدِمُ الهَاتِفَ؟ وَلِمَاذَا؟</a:t>
@@ -24553,6 +24694,7 @@
                   <a:srgbClr val="1B3B6F"/>
                 </a:solidFill>
                 <a:latin typeface="Amiri" pitchFamily="2" charset="-78"/>
+                <a:ea typeface="Amiri" pitchFamily="2" charset="-78"/>
                 <a:cs typeface="Amiri" pitchFamily="2" charset="-78"/>
               </a:rPr>
               <a:t>مَا تَطْبِيقُكَ المُفَضَّلُ؟ وَلِمَاذَا؟</a:t>
@@ -24694,6 +24836,7 @@
                   <a:srgbClr val="1B3B6F"/>
                 </a:solidFill>
                 <a:latin typeface="Amiri" pitchFamily="2" charset="-78"/>
+                <a:ea typeface="Amiri" pitchFamily="2" charset="-78"/>
                 <a:cs typeface="Amiri" pitchFamily="2" charset="-78"/>
               </a:rPr>
               <a:t>مَاذَا حَدَثَ مُؤَخَّرًا لَهُ عَلَاقَةٌ بِالتِّكْنُولُوجْيَا؟</a:t>
@@ -24835,6 +24978,7 @@
                   <a:srgbClr val="1B3B6F"/>
                 </a:solidFill>
                 <a:latin typeface="Amiri" pitchFamily="2" charset="-78"/>
+                <a:ea typeface="Amiri" pitchFamily="2" charset="-78"/>
                 <a:cs typeface="Amiri" pitchFamily="2" charset="-78"/>
               </a:rPr>
               <a:t>مَا رَأْيُكَ؟ وَمَاذَا سَتُغَيِّرُ؟</a:t>
@@ -25044,6 +25188,7 @@
                   <a:srgbClr val="D4AF37"/>
                 </a:solidFill>
                 <a:latin typeface="Amiri" pitchFamily="2" charset="-78"/>
+                <a:ea typeface="Amiri" pitchFamily="2" charset="-78"/>
                 <a:cs typeface="Amiri" pitchFamily="2" charset="-78"/>
               </a:rPr>
               <a:t>م</a:t>
@@ -25364,6 +25509,7 @@
                   <a:srgbClr val="8A6D1E"/>
                 </a:solidFill>
                 <a:latin typeface="Amiri" pitchFamily="2" charset="-78"/>
+                <a:ea typeface="Amiri" pitchFamily="2" charset="-78"/>
                 <a:cs typeface="Amiri" pitchFamily="2" charset="-78"/>
               </a:rPr>
               <a:t>قَوَالِبُ الكِتَابَةِ</a:t>
@@ -25644,6 +25790,7 @@
                   <a:srgbClr val="1B3B6F"/>
                 </a:solidFill>
                 <a:latin typeface="Amiri" pitchFamily="2" charset="-78"/>
+                <a:ea typeface="Amiri" pitchFamily="2" charset="-78"/>
                 <a:cs typeface="Amiri" pitchFamily="2" charset="-78"/>
               </a:rPr>
               <a:t>مَرْحَبًا يَا ______ ، كَيْفَ حَالُكَ؟</a:t>
@@ -25850,6 +25997,7 @@
                   <a:srgbClr val="1B3B6F"/>
                 </a:solidFill>
                 <a:latin typeface="Amiri" pitchFamily="2" charset="-78"/>
+                <a:ea typeface="Amiri" pitchFamily="2" charset="-78"/>
                 <a:cs typeface="Amiri" pitchFamily="2" charset="-78"/>
               </a:rPr>
               <a:t>أَسْتَخْدِمُ هَاتِفِي ______ سَاعَاتٍ، وَأَتَوَاصَلُ مَعَ ______ .</a:t>
@@ -26056,6 +26204,7 @@
                   <a:srgbClr val="1B3B6F"/>
                 </a:solidFill>
                 <a:latin typeface="Amiri" pitchFamily="2" charset="-78"/>
+                <a:ea typeface="Amiri" pitchFamily="2" charset="-78"/>
                 <a:cs typeface="Amiri" pitchFamily="2" charset="-78"/>
               </a:rPr>
               <a:t>تَطْبِيقِيَ المُفَضَّلُ ______ ، لِأَنَّهُ ______ .</a:t>
@@ -26262,6 +26411,7 @@
                   <a:srgbClr val="1B3B6F"/>
                 </a:solidFill>
                 <a:latin typeface="Amiri" pitchFamily="2" charset="-78"/>
+                <a:ea typeface="Amiri" pitchFamily="2" charset="-78"/>
                 <a:cs typeface="Amiri" pitchFamily="2" charset="-78"/>
               </a:rPr>
               <a:t>فِي الأُسْبُوعِ المَاضِي ______ .</a:t>
@@ -26468,6 +26618,7 @@
                   <a:srgbClr val="1B3B6F"/>
                 </a:solidFill>
                 <a:latin typeface="Amiri" pitchFamily="2" charset="-78"/>
+                <a:ea typeface="Amiri" pitchFamily="2" charset="-78"/>
                 <a:cs typeface="Amiri" pitchFamily="2" charset="-78"/>
               </a:rPr>
               <a:t>فِي رَأْيِي ______ . فِي المُسْتَقْبَلِ سَأَسْتَخْدِمُ ______ أَقَلَّ.</a:t>
@@ -26674,6 +26825,7 @@
                   <a:srgbClr val="1B3B6F"/>
                 </a:solidFill>
                 <a:latin typeface="Amiri" pitchFamily="2" charset="-78"/>
+                <a:ea typeface="Amiri" pitchFamily="2" charset="-78"/>
                 <a:cs typeface="Amiri" pitchFamily="2" charset="-78"/>
               </a:rPr>
               <a:t>إِلَى اللِّقَاءِ، ______</a:t>
@@ -26913,13 +27065,9 @@
     <a:fontScheme name="Office">
       <a:majorFont>
         <a:latin typeface="Calibri Light" panose="020F0302020204030204"/>
-        <a:ea typeface=""/>
-        <a:cs typeface=""/>
-        <a:font script="Jpan" typeface="游ゴシック Light"/>
-        <a:font script="Hang" typeface="맑은 고딕"/>
-        <a:font script="Hans" typeface="等线 Light"/>
-        <a:font script="Hant" typeface="新細明體"/>
-        <a:font script="Arab" typeface="Times New Roman"/>
+        <a:ea typeface="Amiri" pitchFamily="2" charset="-78"/>
+        <a:cs typeface="Amiri" pitchFamily="2" charset="-78"/>
+        <a:font script="Arab" typeface="Amiri"/>
         <a:font script="Hebr" typeface="Times New Roman"/>
         <a:font script="Thai" typeface="Angsana New"/>
         <a:font script="Ethi" typeface="Nyala"/>
@@ -26965,13 +27113,9 @@
       </a:majorFont>
       <a:minorFont>
         <a:latin typeface="Calibri" panose="020F0502020204030204"/>
-        <a:ea typeface=""/>
-        <a:cs typeface=""/>
-        <a:font script="Jpan" typeface="游ゴシック"/>
-        <a:font script="Hang" typeface="맑은 고딕"/>
-        <a:font script="Hans" typeface="等线"/>
-        <a:font script="Hant" typeface="新細明體"/>
-        <a:font script="Arab" typeface="Arial"/>
+        <a:ea typeface="Amiri" pitchFamily="2" charset="-78"/>
+        <a:cs typeface="Amiri" pitchFamily="2" charset="-78"/>
+        <a:font script="Arab" typeface="Amiri"/>
         <a:font script="Hebr" typeface="Arial"/>
         <a:font script="Thai" typeface="Cordia New"/>
         <a:font script="Ethi" typeface="Nyala"/>

--- a/Topic_C/Exam_Practice/TC-L06_Writing_Workshop_Digital_World_Communication.pptx
+++ b/Topic_C/Exam_Practice/TC-L06_Writing_Workshop_Digital_World_Communication.pptx
@@ -3848,7 +3848,7 @@
                 <a:solidFill>
                   <a:srgbClr val="FFFFFF"/>
                 </a:solidFill>
-                <a:latin typeface="Calibri" pitchFamily="34" charset="0"/>
+                <a:latin typeface="Amiri" pitchFamily="2" charset="-78"/>
                 <a:ea typeface="Amiri" pitchFamily="2" charset="-78"/>
                 <a:cs typeface="Amiri" pitchFamily="2" charset="-78"/>
               </a:rPr>
@@ -3914,7 +3914,7 @@
                 <a:solidFill>
                   <a:srgbClr val="FFFFFF"/>
                 </a:solidFill>
-                <a:latin typeface="Calibri" pitchFamily="34" charset="0"/>
+                <a:latin typeface="Amiri" pitchFamily="2" charset="-78"/>
                 <a:ea typeface="Amiri" pitchFamily="2" charset="-78"/>
                 <a:cs typeface="Amiri" pitchFamily="2" charset="-78"/>
               </a:rPr>
@@ -3980,7 +3980,7 @@
                 <a:solidFill>
                   <a:srgbClr val="FFFFFF"/>
                 </a:solidFill>
-                <a:latin typeface="Calibri" pitchFamily="34" charset="0"/>
+                <a:latin typeface="Amiri" pitchFamily="2" charset="-78"/>
                 <a:ea typeface="Amiri" pitchFamily="2" charset="-78"/>
                 <a:cs typeface="Amiri" pitchFamily="2" charset="-78"/>
               </a:rPr>
@@ -4046,7 +4046,7 @@
                 <a:solidFill>
                   <a:srgbClr val="FFFFFF"/>
                 </a:solidFill>
-                <a:latin typeface="Calibri" pitchFamily="34" charset="0"/>
+                <a:latin typeface="Amiri" pitchFamily="2" charset="-78"/>
                 <a:ea typeface="Amiri" pitchFamily="2" charset="-78"/>
                 <a:cs typeface="Amiri" pitchFamily="2" charset="-78"/>
               </a:rPr>
@@ -4844,7 +4844,7 @@
                 <a:solidFill>
                   <a:srgbClr val="FFFFFF"/>
                 </a:solidFill>
-                <a:latin typeface="Calibri" pitchFamily="34" charset="0"/>
+                <a:latin typeface="Amiri" pitchFamily="2" charset="-78"/>
                 <a:ea typeface="Amiri" pitchFamily="2" charset="-78"/>
                 <a:cs typeface="Amiri" pitchFamily="2" charset="-78"/>
               </a:rPr>
@@ -4910,7 +4910,7 @@
                 <a:solidFill>
                   <a:srgbClr val="FFFFFF"/>
                 </a:solidFill>
-                <a:latin typeface="Calibri" pitchFamily="34" charset="0"/>
+                <a:latin typeface="Amiri" pitchFamily="2" charset="-78"/>
                 <a:ea typeface="Amiri" pitchFamily="2" charset="-78"/>
                 <a:cs typeface="Amiri" pitchFamily="2" charset="-78"/>
               </a:rPr>
@@ -4976,7 +4976,7 @@
                 <a:solidFill>
                   <a:srgbClr val="FFFFFF"/>
                 </a:solidFill>
-                <a:latin typeface="Calibri" pitchFamily="34" charset="0"/>
+                <a:latin typeface="Amiri" pitchFamily="2" charset="-78"/>
                 <a:ea typeface="Amiri" pitchFamily="2" charset="-78"/>
                 <a:cs typeface="Amiri" pitchFamily="2" charset="-78"/>
               </a:rPr>
@@ -5042,7 +5042,7 @@
                 <a:solidFill>
                   <a:srgbClr val="FFFFFF"/>
                 </a:solidFill>
-                <a:latin typeface="Calibri" pitchFamily="34" charset="0"/>
+                <a:latin typeface="Amiri" pitchFamily="2" charset="-78"/>
                 <a:ea typeface="Amiri" pitchFamily="2" charset="-78"/>
                 <a:cs typeface="Amiri" pitchFamily="2" charset="-78"/>
               </a:rPr>
@@ -8599,7 +8599,7 @@
                 <a:solidFill>
                   <a:srgbClr val="FFFFFF"/>
                 </a:solidFill>
-                <a:latin typeface="Calibri" pitchFamily="34" charset="0"/>
+                <a:latin typeface="Amiri" pitchFamily="2" charset="-78"/>
                 <a:ea typeface="Amiri" pitchFamily="2" charset="-78"/>
                 <a:cs typeface="Amiri" pitchFamily="2" charset="-78"/>
               </a:rPr>
@@ -8665,7 +8665,7 @@
                 <a:solidFill>
                   <a:srgbClr val="FFFFFF"/>
                 </a:solidFill>
-                <a:latin typeface="Calibri" pitchFamily="34" charset="0"/>
+                <a:latin typeface="Amiri" pitchFamily="2" charset="-78"/>
                 <a:ea typeface="Amiri" pitchFamily="2" charset="-78"/>
                 <a:cs typeface="Amiri" pitchFamily="2" charset="-78"/>
               </a:rPr>
@@ -8731,7 +8731,7 @@
                 <a:solidFill>
                   <a:srgbClr val="FFFFFF"/>
                 </a:solidFill>
-                <a:latin typeface="Calibri" pitchFamily="34" charset="0"/>
+                <a:latin typeface="Amiri" pitchFamily="2" charset="-78"/>
                 <a:ea typeface="Amiri" pitchFamily="2" charset="-78"/>
                 <a:cs typeface="Amiri" pitchFamily="2" charset="-78"/>
               </a:rPr>
@@ -8797,7 +8797,7 @@
                 <a:solidFill>
                   <a:srgbClr val="FFFFFF"/>
                 </a:solidFill>
-                <a:latin typeface="Calibri" pitchFamily="34" charset="0"/>
+                <a:latin typeface="Amiri" pitchFamily="2" charset="-78"/>
                 <a:ea typeface="Amiri" pitchFamily="2" charset="-78"/>
                 <a:cs typeface="Amiri" pitchFamily="2" charset="-78"/>
               </a:rPr>
@@ -9584,7 +9584,7 @@
                 <a:solidFill>
                   <a:srgbClr val="FFFFFF"/>
                 </a:solidFill>
-                <a:latin typeface="Calibri" pitchFamily="34" charset="0"/>
+                <a:latin typeface="Amiri" pitchFamily="2" charset="-78"/>
                 <a:ea typeface="Amiri" pitchFamily="2" charset="-78"/>
                 <a:cs typeface="Amiri" pitchFamily="2" charset="-78"/>
               </a:rPr>
@@ -9650,7 +9650,7 @@
                 <a:solidFill>
                   <a:srgbClr val="FFFFFF"/>
                 </a:solidFill>
-                <a:latin typeface="Calibri" pitchFamily="34" charset="0"/>
+                <a:latin typeface="Amiri" pitchFamily="2" charset="-78"/>
                 <a:ea typeface="Amiri" pitchFamily="2" charset="-78"/>
                 <a:cs typeface="Amiri" pitchFamily="2" charset="-78"/>
               </a:rPr>
@@ -9716,7 +9716,7 @@
                 <a:solidFill>
                   <a:srgbClr val="FFFFFF"/>
                 </a:solidFill>
-                <a:latin typeface="Calibri" pitchFamily="34" charset="0"/>
+                <a:latin typeface="Amiri" pitchFamily="2" charset="-78"/>
                 <a:ea typeface="Amiri" pitchFamily="2" charset="-78"/>
                 <a:cs typeface="Amiri" pitchFamily="2" charset="-78"/>
               </a:rPr>
@@ -9782,7 +9782,7 @@
                 <a:solidFill>
                   <a:srgbClr val="FFFFFF"/>
                 </a:solidFill>
-                <a:latin typeface="Calibri" pitchFamily="34" charset="0"/>
+                <a:latin typeface="Amiri" pitchFamily="2" charset="-78"/>
                 <a:ea typeface="Amiri" pitchFamily="2" charset="-78"/>
                 <a:cs typeface="Amiri" pitchFamily="2" charset="-78"/>
               </a:rPr>
@@ -10569,7 +10569,7 @@
                 <a:solidFill>
                   <a:srgbClr val="FFFFFF"/>
                 </a:solidFill>
-                <a:latin typeface="Calibri" pitchFamily="34" charset="0"/>
+                <a:latin typeface="Amiri" pitchFamily="2" charset="-78"/>
                 <a:ea typeface="Amiri" pitchFamily="2" charset="-78"/>
                 <a:cs typeface="Amiri" pitchFamily="2" charset="-78"/>
               </a:rPr>
@@ -10635,7 +10635,7 @@
                 <a:solidFill>
                   <a:srgbClr val="FFFFFF"/>
                 </a:solidFill>
-                <a:latin typeface="Calibri" pitchFamily="34" charset="0"/>
+                <a:latin typeface="Amiri" pitchFamily="2" charset="-78"/>
                 <a:ea typeface="Amiri" pitchFamily="2" charset="-78"/>
                 <a:cs typeface="Amiri" pitchFamily="2" charset="-78"/>
               </a:rPr>
@@ -10701,7 +10701,7 @@
                 <a:solidFill>
                   <a:srgbClr val="FFFFFF"/>
                 </a:solidFill>
-                <a:latin typeface="Calibri" pitchFamily="34" charset="0"/>
+                <a:latin typeface="Amiri" pitchFamily="2" charset="-78"/>
                 <a:ea typeface="Amiri" pitchFamily="2" charset="-78"/>
                 <a:cs typeface="Amiri" pitchFamily="2" charset="-78"/>
               </a:rPr>
@@ -10767,7 +10767,7 @@
                 <a:solidFill>
                   <a:srgbClr val="FFFFFF"/>
                 </a:solidFill>
-                <a:latin typeface="Calibri" pitchFamily="34" charset="0"/>
+                <a:latin typeface="Amiri" pitchFamily="2" charset="-78"/>
                 <a:ea typeface="Amiri" pitchFamily="2" charset="-78"/>
                 <a:cs typeface="Amiri" pitchFamily="2" charset="-78"/>
               </a:rPr>
